--- a/paper/Stage2/IllusionTablepptx.pptx
+++ b/paper/Stage2/IllusionTablepptx.pptx
@@ -197,7 +197,7 @@
           <a:p>
             <a:fld id="{F660B25F-A1D7-4641-B84D-4EA17F879FAD}" type="datetimeFigureOut">
               <a:rPr lang="en-GB" smtClean="0"/>
-              <a:t>04/03/2025</a:t>
+              <a:t>27/04/2026</a:t>
             </a:fld>
             <a:endParaRPr lang="en-GB"/>
           </a:p>
@@ -685,7 +685,7 @@
           <a:p>
             <a:fld id="{6BE6577F-8B27-443F-861A-67A305ED1D46}" type="datetimeFigureOut">
               <a:rPr lang="en-GB" smtClean="0"/>
-              <a:t>04/03/2025</a:t>
+              <a:t>27/04/2026</a:t>
             </a:fld>
             <a:endParaRPr lang="en-GB"/>
           </a:p>
@@ -855,7 +855,7 @@
           <a:p>
             <a:fld id="{6BE6577F-8B27-443F-861A-67A305ED1D46}" type="datetimeFigureOut">
               <a:rPr lang="en-GB" smtClean="0"/>
-              <a:t>04/03/2025</a:t>
+              <a:t>27/04/2026</a:t>
             </a:fld>
             <a:endParaRPr lang="en-GB"/>
           </a:p>
@@ -1035,7 +1035,7 @@
           <a:p>
             <a:fld id="{6BE6577F-8B27-443F-861A-67A305ED1D46}" type="datetimeFigureOut">
               <a:rPr lang="en-GB" smtClean="0"/>
-              <a:t>04/03/2025</a:t>
+              <a:t>27/04/2026</a:t>
             </a:fld>
             <a:endParaRPr lang="en-GB"/>
           </a:p>
@@ -1205,7 +1205,7 @@
           <a:p>
             <a:fld id="{6BE6577F-8B27-443F-861A-67A305ED1D46}" type="datetimeFigureOut">
               <a:rPr lang="en-GB" smtClean="0"/>
-              <a:t>04/03/2025</a:t>
+              <a:t>27/04/2026</a:t>
             </a:fld>
             <a:endParaRPr lang="en-GB"/>
           </a:p>
@@ -1451,7 +1451,7 @@
           <a:p>
             <a:fld id="{6BE6577F-8B27-443F-861A-67A305ED1D46}" type="datetimeFigureOut">
               <a:rPr lang="en-GB" smtClean="0"/>
-              <a:t>04/03/2025</a:t>
+              <a:t>27/04/2026</a:t>
             </a:fld>
             <a:endParaRPr lang="en-GB"/>
           </a:p>
@@ -1683,7 +1683,7 @@
           <a:p>
             <a:fld id="{6BE6577F-8B27-443F-861A-67A305ED1D46}" type="datetimeFigureOut">
               <a:rPr lang="en-GB" smtClean="0"/>
-              <a:t>04/03/2025</a:t>
+              <a:t>27/04/2026</a:t>
             </a:fld>
             <a:endParaRPr lang="en-GB"/>
           </a:p>
@@ -2050,7 +2050,7 @@
           <a:p>
             <a:fld id="{6BE6577F-8B27-443F-861A-67A305ED1D46}" type="datetimeFigureOut">
               <a:rPr lang="en-GB" smtClean="0"/>
-              <a:t>04/03/2025</a:t>
+              <a:t>27/04/2026</a:t>
             </a:fld>
             <a:endParaRPr lang="en-GB"/>
           </a:p>
@@ -2168,7 +2168,7 @@
           <a:p>
             <a:fld id="{6BE6577F-8B27-443F-861A-67A305ED1D46}" type="datetimeFigureOut">
               <a:rPr lang="en-GB" smtClean="0"/>
-              <a:t>04/03/2025</a:t>
+              <a:t>27/04/2026</a:t>
             </a:fld>
             <a:endParaRPr lang="en-GB"/>
           </a:p>
@@ -2263,7 +2263,7 @@
           <a:p>
             <a:fld id="{6BE6577F-8B27-443F-861A-67A305ED1D46}" type="datetimeFigureOut">
               <a:rPr lang="en-GB" smtClean="0"/>
-              <a:t>04/03/2025</a:t>
+              <a:t>27/04/2026</a:t>
             </a:fld>
             <a:endParaRPr lang="en-GB"/>
           </a:p>
@@ -2540,7 +2540,7 @@
           <a:p>
             <a:fld id="{6BE6577F-8B27-443F-861A-67A305ED1D46}" type="datetimeFigureOut">
               <a:rPr lang="en-GB" smtClean="0"/>
-              <a:t>04/03/2025</a:t>
+              <a:t>27/04/2026</a:t>
             </a:fld>
             <a:endParaRPr lang="en-GB"/>
           </a:p>
@@ -2797,7 +2797,7 @@
           <a:p>
             <a:fld id="{6BE6577F-8B27-443F-861A-67A305ED1D46}" type="datetimeFigureOut">
               <a:rPr lang="en-GB" smtClean="0"/>
-              <a:t>04/03/2025</a:t>
+              <a:t>27/04/2026</a:t>
             </a:fld>
             <a:endParaRPr lang="en-GB"/>
           </a:p>
@@ -3010,7 +3010,7 @@
           <a:p>
             <a:fld id="{6BE6577F-8B27-443F-861A-67A305ED1D46}" type="datetimeFigureOut">
               <a:rPr lang="en-GB" smtClean="0"/>
-              <a:t>04/03/2025</a:t>
+              <a:t>27/04/2026</a:t>
             </a:fld>
             <a:endParaRPr lang="en-GB"/>
           </a:p>
@@ -5000,10 +5000,10 @@
       </p:pic>
       <p:pic>
         <p:nvPicPr>
-          <p:cNvPr id="77" name="Picture 76" descr="Chart, line chart&#10;&#10;Description automatically generated">
+          <p:cNvPr id="9" name="Picture 8">
             <a:extLst>
               <a:ext uri="{FF2B5EF4-FFF2-40B4-BE49-F238E27FC236}">
-                <a16:creationId xmlns:a16="http://schemas.microsoft.com/office/drawing/2014/main" id="{77665077-0270-EE81-8907-CB751B2C5D0A}"/>
+                <a16:creationId xmlns:a16="http://schemas.microsoft.com/office/drawing/2014/main" id="{6F4AE086-0A2C-34BA-62C1-E552D5FA0D2F}"/>
               </a:ext>
             </a:extLst>
           </p:cNvPr>
@@ -5026,8 +5026,8 @@
         </p:blipFill>
         <p:spPr>
           <a:xfrm>
-            <a:off x="4438914" y="5782444"/>
-            <a:ext cx="2160000" cy="2160000"/>
+            <a:off x="4093818" y="5782443"/>
+            <a:ext cx="2785721" cy="2089291"/>
           </a:xfrm>
           <a:prstGeom prst="rect">
             <a:avLst/>

--- a/paper/Stage2/IllusionTablepptx.pptx
+++ b/paper/Stage2/IllusionTablepptx.pptx
@@ -197,7 +197,7 @@
           <a:p>
             <a:fld id="{F660B25F-A1D7-4641-B84D-4EA17F879FAD}" type="datetimeFigureOut">
               <a:rPr lang="en-GB" smtClean="0"/>
-              <a:t>27/04/2026</a:t>
+              <a:t>28/04/2026</a:t>
             </a:fld>
             <a:endParaRPr lang="en-GB"/>
           </a:p>
@@ -685,7 +685,7 @@
           <a:p>
             <a:fld id="{6BE6577F-8B27-443F-861A-67A305ED1D46}" type="datetimeFigureOut">
               <a:rPr lang="en-GB" smtClean="0"/>
-              <a:t>27/04/2026</a:t>
+              <a:t>28/04/2026</a:t>
             </a:fld>
             <a:endParaRPr lang="en-GB"/>
           </a:p>
@@ -855,7 +855,7 @@
           <a:p>
             <a:fld id="{6BE6577F-8B27-443F-861A-67A305ED1D46}" type="datetimeFigureOut">
               <a:rPr lang="en-GB" smtClean="0"/>
-              <a:t>27/04/2026</a:t>
+              <a:t>28/04/2026</a:t>
             </a:fld>
             <a:endParaRPr lang="en-GB"/>
           </a:p>
@@ -1035,7 +1035,7 @@
           <a:p>
             <a:fld id="{6BE6577F-8B27-443F-861A-67A305ED1D46}" type="datetimeFigureOut">
               <a:rPr lang="en-GB" smtClean="0"/>
-              <a:t>27/04/2026</a:t>
+              <a:t>28/04/2026</a:t>
             </a:fld>
             <a:endParaRPr lang="en-GB"/>
           </a:p>
@@ -1205,7 +1205,7 @@
           <a:p>
             <a:fld id="{6BE6577F-8B27-443F-861A-67A305ED1D46}" type="datetimeFigureOut">
               <a:rPr lang="en-GB" smtClean="0"/>
-              <a:t>27/04/2026</a:t>
+              <a:t>28/04/2026</a:t>
             </a:fld>
             <a:endParaRPr lang="en-GB"/>
           </a:p>
@@ -1451,7 +1451,7 @@
           <a:p>
             <a:fld id="{6BE6577F-8B27-443F-861A-67A305ED1D46}" type="datetimeFigureOut">
               <a:rPr lang="en-GB" smtClean="0"/>
-              <a:t>27/04/2026</a:t>
+              <a:t>28/04/2026</a:t>
             </a:fld>
             <a:endParaRPr lang="en-GB"/>
           </a:p>
@@ -1683,7 +1683,7 @@
           <a:p>
             <a:fld id="{6BE6577F-8B27-443F-861A-67A305ED1D46}" type="datetimeFigureOut">
               <a:rPr lang="en-GB" smtClean="0"/>
-              <a:t>27/04/2026</a:t>
+              <a:t>28/04/2026</a:t>
             </a:fld>
             <a:endParaRPr lang="en-GB"/>
           </a:p>
@@ -2050,7 +2050,7 @@
           <a:p>
             <a:fld id="{6BE6577F-8B27-443F-861A-67A305ED1D46}" type="datetimeFigureOut">
               <a:rPr lang="en-GB" smtClean="0"/>
-              <a:t>27/04/2026</a:t>
+              <a:t>28/04/2026</a:t>
             </a:fld>
             <a:endParaRPr lang="en-GB"/>
           </a:p>
@@ -2168,7 +2168,7 @@
           <a:p>
             <a:fld id="{6BE6577F-8B27-443F-861A-67A305ED1D46}" type="datetimeFigureOut">
               <a:rPr lang="en-GB" smtClean="0"/>
-              <a:t>27/04/2026</a:t>
+              <a:t>28/04/2026</a:t>
             </a:fld>
             <a:endParaRPr lang="en-GB"/>
           </a:p>
@@ -2263,7 +2263,7 @@
           <a:p>
             <a:fld id="{6BE6577F-8B27-443F-861A-67A305ED1D46}" type="datetimeFigureOut">
               <a:rPr lang="en-GB" smtClean="0"/>
-              <a:t>27/04/2026</a:t>
+              <a:t>28/04/2026</a:t>
             </a:fld>
             <a:endParaRPr lang="en-GB"/>
           </a:p>
@@ -2540,7 +2540,7 @@
           <a:p>
             <a:fld id="{6BE6577F-8B27-443F-861A-67A305ED1D46}" type="datetimeFigureOut">
               <a:rPr lang="en-GB" smtClean="0"/>
-              <a:t>27/04/2026</a:t>
+              <a:t>28/04/2026</a:t>
             </a:fld>
             <a:endParaRPr lang="en-GB"/>
           </a:p>
@@ -2797,7 +2797,7 @@
           <a:p>
             <a:fld id="{6BE6577F-8B27-443F-861A-67A305ED1D46}" type="datetimeFigureOut">
               <a:rPr lang="en-GB" smtClean="0"/>
-              <a:t>27/04/2026</a:t>
+              <a:t>28/04/2026</a:t>
             </a:fld>
             <a:endParaRPr lang="en-GB"/>
           </a:p>
@@ -3010,7 +3010,7 @@
           <a:p>
             <a:fld id="{6BE6577F-8B27-443F-861A-67A305ED1D46}" type="datetimeFigureOut">
               <a:rPr lang="en-GB" smtClean="0"/>
-              <a:t>27/04/2026</a:t>
+              <a:t>28/04/2026</a:t>
             </a:fld>
             <a:endParaRPr lang="en-GB"/>
           </a:p>
